--- a/menhelybemutato 1.pptx
+++ b/menhelybemutato 1.pptx
@@ -5426,6 +5426,36 @@
           </a:p>
         </p:txBody>
       </p:sp>
+      <p:pic>
+        <p:nvPicPr>
+          <p:cNvPr id="5" name="Kép 4">
+            <a:extLst>
+              <a:ext uri="{FF2B5EF4-FFF2-40B4-BE49-F238E27FC236}">
+                <a16:creationId xmlns:a16="http://schemas.microsoft.com/office/drawing/2014/main" id="{56886041-F58E-4E9E-A6EE-ADC470FD71B8}"/>
+              </a:ext>
+            </a:extLst>
+          </p:cNvPr>
+          <p:cNvPicPr>
+            <a:picLocks noChangeAspect="1"/>
+          </p:cNvPicPr>
+          <p:nvPr/>
+        </p:nvPicPr>
+        <p:blipFill>
+          <a:blip r:embed="rId2"/>
+          <a:stretch>
+            <a:fillRect/>
+          </a:stretch>
+        </p:blipFill>
+        <p:spPr>
+          <a:xfrm>
+            <a:off x="453368" y="3018408"/>
+            <a:ext cx="4389314" cy="3705680"/>
+          </a:xfrm>
+          <a:prstGeom prst="rect">
+            <a:avLst/>
+          </a:prstGeom>
+        </p:spPr>
+      </p:pic>
     </p:spTree>
     <p:extLst>
       <p:ext uri="{BB962C8B-B14F-4D97-AF65-F5344CB8AC3E}">
@@ -5627,6 +5657,36 @@
           </a:p>
         </p:txBody>
       </p:sp>
+      <p:pic>
+        <p:nvPicPr>
+          <p:cNvPr id="5" name="Kép 4">
+            <a:extLst>
+              <a:ext uri="{FF2B5EF4-FFF2-40B4-BE49-F238E27FC236}">
+                <a16:creationId xmlns:a16="http://schemas.microsoft.com/office/drawing/2014/main" id="{BBA95163-EBA5-4065-8337-44B0DAC9973B}"/>
+              </a:ext>
+            </a:extLst>
+          </p:cNvPr>
+          <p:cNvPicPr>
+            <a:picLocks noChangeAspect="1"/>
+          </p:cNvPicPr>
+          <p:nvPr/>
+        </p:nvPicPr>
+        <p:blipFill>
+          <a:blip r:embed="rId2"/>
+          <a:stretch>
+            <a:fillRect/>
+          </a:stretch>
+        </p:blipFill>
+        <p:spPr>
+          <a:xfrm>
+            <a:off x="927553" y="3741038"/>
+            <a:ext cx="3666702" cy="2791568"/>
+          </a:xfrm>
+          <a:prstGeom prst="rect">
+            <a:avLst/>
+          </a:prstGeom>
+        </p:spPr>
+      </p:pic>
     </p:spTree>
     <p:extLst>
       <p:ext uri="{BB962C8B-B14F-4D97-AF65-F5344CB8AC3E}">

--- a/menhelybemutato 1.pptx
+++ b/menhelybemutato 1.pptx
@@ -5,17 +5,16 @@
     <p:sldMasterId id="2147483648" r:id="rId1"/>
   </p:sldMasterIdLst>
   <p:notesMasterIdLst>
-    <p:notesMasterId r:id="rId7"/>
+    <p:notesMasterId r:id="rId6"/>
   </p:notesMasterIdLst>
   <p:handoutMasterIdLst>
-    <p:handoutMasterId r:id="rId8"/>
+    <p:handoutMasterId r:id="rId7"/>
   </p:handoutMasterIdLst>
   <p:sldIdLst>
     <p:sldId id="256" r:id="rId2"/>
     <p:sldId id="257" r:id="rId3"/>
     <p:sldId id="258" r:id="rId4"/>
     <p:sldId id="259" r:id="rId5"/>
-    <p:sldId id="260" r:id="rId6"/>
   </p:sldIdLst>
   <p:sldSz cx="12192000" cy="6858000"/>
   <p:notesSz cx="6858000" cy="9144000"/>
@@ -739,6 +738,147 @@
     <p:extLst>
       <p:ext uri="{BB962C8B-B14F-4D97-AF65-F5344CB8AC3E}">
         <p14:creationId xmlns:p14="http://schemas.microsoft.com/office/powerpoint/2010/main" val="1513483280"/>
+      </p:ext>
+    </p:extLst>
+  </p:cSld>
+  <p:clrMapOvr>
+    <a:masterClrMapping/>
+  </p:clrMapOvr>
+</p:notes>
+</file>
+
+<file path=ppt/notesSlides/notesSlide2.xml><?xml version="1.0" encoding="utf-8"?>
+<p:notes xmlns:a="http://schemas.openxmlformats.org/drawingml/2006/main" xmlns:r="http://schemas.openxmlformats.org/officeDocument/2006/relationships" xmlns:p="http://schemas.openxmlformats.org/presentationml/2006/main">
+  <p:cSld>
+    <p:spTree>
+      <p:nvGrpSpPr>
+        <p:cNvPr id="1" name=""/>
+        <p:cNvGrpSpPr/>
+        <p:nvPr/>
+      </p:nvGrpSpPr>
+      <p:grpSpPr>
+        <a:xfrm>
+          <a:off x="0" y="0"/>
+          <a:ext cx="0" cy="0"/>
+          <a:chOff x="0" y="0"/>
+          <a:chExt cx="0" cy="0"/>
+        </a:xfrm>
+      </p:grpSpPr>
+      <p:sp>
+        <p:nvSpPr>
+          <p:cNvPr id="2" name="Diakép helye 1"/>
+          <p:cNvSpPr>
+            <a:spLocks noGrp="1" noRot="1" noChangeAspect="1"/>
+          </p:cNvSpPr>
+          <p:nvPr>
+            <p:ph type="sldImg"/>
+          </p:nvPr>
+        </p:nvSpPr>
+        <p:spPr/>
+      </p:sp>
+      <p:sp>
+        <p:nvSpPr>
+          <p:cNvPr id="3" name="Jegyzetek helye 2"/>
+          <p:cNvSpPr>
+            <a:spLocks noGrp="1"/>
+          </p:cNvSpPr>
+          <p:nvPr>
+            <p:ph type="body" idx="1"/>
+          </p:nvPr>
+        </p:nvSpPr>
+        <p:spPr/>
+        <p:txBody>
+          <a:bodyPr/>
+          <a:lstStyle/>
+          <a:p>
+            <a:r>
+              <a:rPr lang="en-US" b="1" dirty="0"/>
+              <a:t>At our shelter, many dogs wait for a new home.</a:t>
+            </a:r>
+            <a:r>
+              <a:rPr lang="en-US" dirty="0"/>
+              <a:t> You can find puppies from 8–10 weeks old and dogs up to </a:t>
+            </a:r>
+            <a:r>
+              <a:rPr lang="hu-HU" dirty="0"/>
+              <a:t>10</a:t>
+            </a:r>
+            <a:r>
+              <a:rPr lang="en-US" dirty="0"/>
+              <a:t> years. </a:t>
+            </a:r>
+            <a:r>
+              <a:rPr lang="hu-HU" dirty="0"/>
+              <a:t> </a:t>
+            </a:r>
+            <a:r>
+              <a:rPr lang="en-US" dirty="0"/>
+              <a:t>At our shelter, you can not only adopt dogs, but also upload dogs who need a new home.</a:t>
+            </a:r>
+          </a:p>
+          <a:p>
+            <a:r>
+              <a:rPr lang="en-US" b="1" dirty="0"/>
+              <a:t>Adoption is easy:</a:t>
+            </a:r>
+            <a:endParaRPr lang="en-US" dirty="0"/>
+          </a:p>
+          <a:p>
+            <a:r>
+              <a:rPr lang="en-US" dirty="0"/>
+              <a:t>Choose your dog online with a few clicks</a:t>
+            </a:r>
+          </a:p>
+          <a:p>
+            <a:r>
+              <a:rPr lang="en-US" dirty="0"/>
+              <a:t>Call us to agree on the details</a:t>
+            </a:r>
+          </a:p>
+          <a:p>
+            <a:r>
+              <a:rPr lang="en-US" dirty="0"/>
+              <a:t>You can come the next day and take your dog home</a:t>
+            </a:r>
+          </a:p>
+          <a:p>
+            <a:r>
+              <a:rPr lang="en-US" dirty="0"/>
+              <a:t>Give a dog the loving home it dreams of!</a:t>
+            </a:r>
+          </a:p>
+          <a:p>
+            <a:endParaRPr lang="hu-HU" dirty="0"/>
+          </a:p>
+        </p:txBody>
+      </p:sp>
+      <p:sp>
+        <p:nvSpPr>
+          <p:cNvPr id="4" name="Dia számának helye 3"/>
+          <p:cNvSpPr>
+            <a:spLocks noGrp="1"/>
+          </p:cNvSpPr>
+          <p:nvPr>
+            <p:ph type="sldNum" sz="quarter" idx="5"/>
+          </p:nvPr>
+        </p:nvSpPr>
+        <p:spPr/>
+        <p:txBody>
+          <a:bodyPr/>
+          <a:lstStyle/>
+          <a:p>
+            <a:fld id="{D1A8A364-3D9A-4EC8-959B-291924AF7E56}" type="slidenum">
+              <a:rPr lang="hu-HU" noProof="0" smtClean="0"/>
+              <a:t>2</a:t>
+            </a:fld>
+            <a:endParaRPr lang="hu-HU" noProof="0"/>
+          </a:p>
+        </p:txBody>
+      </p:sp>
+    </p:spTree>
+    <p:extLst>
+      <p:ext uri="{BB962C8B-B14F-4D97-AF65-F5344CB8AC3E}">
+        <p14:creationId xmlns:p14="http://schemas.microsoft.com/office/powerpoint/2010/main" val="991927471"/>
       </p:ext>
     </p:extLst>
   </p:cSld>
@@ -4518,7 +4658,12 @@
             <p:ph type="title"/>
           </p:nvPr>
         </p:nvSpPr>
-        <p:spPr/>
+        <p:spPr>
+          <a:xfrm>
+            <a:off x="571500" y="257945"/>
+            <a:ext cx="9603275" cy="1049235"/>
+          </a:xfrm>
+        </p:spPr>
         <p:txBody>
           <a:bodyPr/>
           <a:lstStyle/>
@@ -4531,87 +4676,36 @@
           </a:p>
         </p:txBody>
       </p:sp>
-      <p:sp>
-        <p:nvSpPr>
-          <p:cNvPr id="3" name="Tartalom helye 2">
+      <p:pic>
+        <p:nvPicPr>
+          <p:cNvPr id="7" name="Kép 6">
             <a:extLst>
               <a:ext uri="{FF2B5EF4-FFF2-40B4-BE49-F238E27FC236}">
-                <a16:creationId xmlns:a16="http://schemas.microsoft.com/office/drawing/2014/main" id="{B1E74F1E-E51B-33C4-2222-D4DD647D1A68}"/>
+                <a16:creationId xmlns:a16="http://schemas.microsoft.com/office/drawing/2014/main" id="{474625CE-276C-48E3-B095-1D227AFED00B}"/>
               </a:ext>
             </a:extLst>
           </p:cNvPr>
-          <p:cNvSpPr>
-            <a:spLocks noGrp="1"/>
-          </p:cNvSpPr>
-          <p:nvPr>
-            <p:ph idx="1"/>
-          </p:nvPr>
-        </p:nvSpPr>
-        <p:spPr/>
-        <p:txBody>
-          <a:bodyPr>
-            <a:normAutofit lnSpcReduction="10000"/>
-          </a:bodyPr>
-          <a:lstStyle/>
-          <a:p>
-            <a:r>
-              <a:rPr lang="en-US" b="1" dirty="0"/>
-              <a:t>At our shelter, many dogs wait for a new home.</a:t>
-            </a:r>
-            <a:r>
-              <a:rPr lang="en-US" dirty="0"/>
-              <a:t> You can find puppies from 8–10 weeks old and dogs up to </a:t>
-            </a:r>
-            <a:r>
-              <a:rPr lang="hu-HU" dirty="0"/>
-              <a:t>10</a:t>
-            </a:r>
-            <a:r>
-              <a:rPr lang="en-US" dirty="0"/>
-              <a:t> years. </a:t>
-            </a:r>
-            <a:r>
-              <a:rPr lang="hu-HU" dirty="0"/>
-              <a:t> </a:t>
-            </a:r>
-            <a:r>
-              <a:rPr lang="en-US" dirty="0"/>
-              <a:t>At our shelter, you can not only adopt dogs, but also upload dogs who need a new home.</a:t>
-            </a:r>
-          </a:p>
-          <a:p>
-            <a:r>
-              <a:rPr lang="en-US" b="1" dirty="0"/>
-              <a:t>Adoption is easy:</a:t>
-            </a:r>
-            <a:endParaRPr lang="en-US" dirty="0"/>
-          </a:p>
-          <a:p>
-            <a:r>
-              <a:rPr lang="en-US" dirty="0"/>
-              <a:t>Choose your dog online with a few clicks</a:t>
-            </a:r>
-          </a:p>
-          <a:p>
-            <a:r>
-              <a:rPr lang="en-US" dirty="0"/>
-              <a:t>Call us to agree on the details</a:t>
-            </a:r>
-          </a:p>
-          <a:p>
-            <a:r>
-              <a:rPr lang="en-US" dirty="0"/>
-              <a:t>You can come the next day and take your dog home</a:t>
-            </a:r>
-          </a:p>
-          <a:p>
-            <a:r>
-              <a:rPr lang="en-US" dirty="0"/>
-              <a:t>Give a dog the loving home it dreams of!</a:t>
-            </a:r>
-          </a:p>
-        </p:txBody>
-      </p:sp>
+          <p:cNvPicPr>
+            <a:picLocks noChangeAspect="1"/>
+          </p:cNvPicPr>
+          <p:nvPr/>
+        </p:nvPicPr>
+        <p:blipFill>
+          <a:blip r:embed="rId3"/>
+          <a:stretch>
+            <a:fillRect/>
+          </a:stretch>
+        </p:blipFill>
+        <p:spPr>
+          <a:xfrm>
+            <a:off x="571500" y="1049235"/>
+            <a:ext cx="11048999" cy="5550820"/>
+          </a:xfrm>
+          <a:prstGeom prst="rect">
+            <a:avLst/>
+          </a:prstGeom>
+        </p:spPr>
+      </p:pic>
     </p:spTree>
     <p:extLst>
       <p:ext uri="{BB962C8B-B14F-4D97-AF65-F5344CB8AC3E}">
@@ -4622,726 +4716,6 @@
   <p:clrMapOvr>
     <a:masterClrMapping/>
   </p:clrMapOvr>
-  <p:timing>
-    <p:tnLst>
-      <p:par>
-        <p:cTn id="1" dur="indefinite" restart="never" nodeType="tmRoot">
-          <p:childTnLst>
-            <p:seq concurrent="1" nextAc="seek">
-              <p:cTn id="2" dur="indefinite" nodeType="mainSeq">
-                <p:childTnLst>
-                  <p:par>
-                    <p:cTn id="3" fill="hold">
-                      <p:stCondLst>
-                        <p:cond delay="indefinite"/>
-                      </p:stCondLst>
-                      <p:childTnLst>
-                        <p:par>
-                          <p:cTn id="4" fill="hold">
-                            <p:stCondLst>
-                              <p:cond delay="0"/>
-                            </p:stCondLst>
-                            <p:childTnLst>
-                              <p:par>
-                                <p:cTn id="5" presetID="42" presetClass="entr" presetSubtype="0" fill="hold" nodeType="clickEffect">
-                                  <p:stCondLst>
-                                    <p:cond delay="0"/>
-                                  </p:stCondLst>
-                                  <p:childTnLst>
-                                    <p:set>
-                                      <p:cBhvr>
-                                        <p:cTn id="6" dur="1" fill="hold">
-                                          <p:stCondLst>
-                                            <p:cond delay="0"/>
-                                          </p:stCondLst>
-                                        </p:cTn>
-                                        <p:tgtEl>
-                                          <p:spTgt spid="3">
-                                            <p:txEl>
-                                              <p:pRg st="0" end="0"/>
-                                            </p:txEl>
-                                          </p:spTgt>
-                                        </p:tgtEl>
-                                        <p:attrNameLst>
-                                          <p:attrName>style.visibility</p:attrName>
-                                        </p:attrNameLst>
-                                      </p:cBhvr>
-                                      <p:to>
-                                        <p:strVal val="visible"/>
-                                      </p:to>
-                                    </p:set>
-                                    <p:animEffect transition="in" filter="fade">
-                                      <p:cBhvr>
-                                        <p:cTn id="7" dur="1000"/>
-                                        <p:tgtEl>
-                                          <p:spTgt spid="3">
-                                            <p:txEl>
-                                              <p:pRg st="0" end="0"/>
-                                            </p:txEl>
-                                          </p:spTgt>
-                                        </p:tgtEl>
-                                      </p:cBhvr>
-                                    </p:animEffect>
-                                    <p:anim calcmode="lin" valueType="num">
-                                      <p:cBhvr>
-                                        <p:cTn id="8" dur="1000" fill="hold"/>
-                                        <p:tgtEl>
-                                          <p:spTgt spid="3">
-                                            <p:txEl>
-                                              <p:pRg st="0" end="0"/>
-                                            </p:txEl>
-                                          </p:spTgt>
-                                        </p:tgtEl>
-                                        <p:attrNameLst>
-                                          <p:attrName>ppt_x</p:attrName>
-                                        </p:attrNameLst>
-                                      </p:cBhvr>
-                                      <p:tavLst>
-                                        <p:tav tm="0">
-                                          <p:val>
-                                            <p:strVal val="#ppt_x"/>
-                                          </p:val>
-                                        </p:tav>
-                                        <p:tav tm="100000">
-                                          <p:val>
-                                            <p:strVal val="#ppt_x"/>
-                                          </p:val>
-                                        </p:tav>
-                                      </p:tavLst>
-                                    </p:anim>
-                                    <p:anim calcmode="lin" valueType="num">
-                                      <p:cBhvr>
-                                        <p:cTn id="9" dur="1000" fill="hold"/>
-                                        <p:tgtEl>
-                                          <p:spTgt spid="3">
-                                            <p:txEl>
-                                              <p:pRg st="0" end="0"/>
-                                            </p:txEl>
-                                          </p:spTgt>
-                                        </p:tgtEl>
-                                        <p:attrNameLst>
-                                          <p:attrName>ppt_y</p:attrName>
-                                        </p:attrNameLst>
-                                      </p:cBhvr>
-                                      <p:tavLst>
-                                        <p:tav tm="0">
-                                          <p:val>
-                                            <p:strVal val="#ppt_y+.1"/>
-                                          </p:val>
-                                        </p:tav>
-                                        <p:tav tm="100000">
-                                          <p:val>
-                                            <p:strVal val="#ppt_y"/>
-                                          </p:val>
-                                        </p:tav>
-                                      </p:tavLst>
-                                    </p:anim>
-                                  </p:childTnLst>
-                                </p:cTn>
-                              </p:par>
-                            </p:childTnLst>
-                          </p:cTn>
-                        </p:par>
-                      </p:childTnLst>
-                    </p:cTn>
-                  </p:par>
-                  <p:par>
-                    <p:cTn id="10" fill="hold">
-                      <p:stCondLst>
-                        <p:cond delay="indefinite"/>
-                      </p:stCondLst>
-                      <p:childTnLst>
-                        <p:par>
-                          <p:cTn id="11" fill="hold">
-                            <p:stCondLst>
-                              <p:cond delay="0"/>
-                            </p:stCondLst>
-                            <p:childTnLst>
-                              <p:par>
-                                <p:cTn id="12" presetID="42" presetClass="entr" presetSubtype="0" fill="hold" nodeType="clickEffect">
-                                  <p:stCondLst>
-                                    <p:cond delay="0"/>
-                                  </p:stCondLst>
-                                  <p:childTnLst>
-                                    <p:set>
-                                      <p:cBhvr>
-                                        <p:cTn id="13" dur="1" fill="hold">
-                                          <p:stCondLst>
-                                            <p:cond delay="0"/>
-                                          </p:stCondLst>
-                                        </p:cTn>
-                                        <p:tgtEl>
-                                          <p:spTgt spid="3">
-                                            <p:txEl>
-                                              <p:pRg st="1" end="1"/>
-                                            </p:txEl>
-                                          </p:spTgt>
-                                        </p:tgtEl>
-                                        <p:attrNameLst>
-                                          <p:attrName>style.visibility</p:attrName>
-                                        </p:attrNameLst>
-                                      </p:cBhvr>
-                                      <p:to>
-                                        <p:strVal val="visible"/>
-                                      </p:to>
-                                    </p:set>
-                                    <p:animEffect transition="in" filter="fade">
-                                      <p:cBhvr>
-                                        <p:cTn id="14" dur="1000"/>
-                                        <p:tgtEl>
-                                          <p:spTgt spid="3">
-                                            <p:txEl>
-                                              <p:pRg st="1" end="1"/>
-                                            </p:txEl>
-                                          </p:spTgt>
-                                        </p:tgtEl>
-                                      </p:cBhvr>
-                                    </p:animEffect>
-                                    <p:anim calcmode="lin" valueType="num">
-                                      <p:cBhvr>
-                                        <p:cTn id="15" dur="1000" fill="hold"/>
-                                        <p:tgtEl>
-                                          <p:spTgt spid="3">
-                                            <p:txEl>
-                                              <p:pRg st="1" end="1"/>
-                                            </p:txEl>
-                                          </p:spTgt>
-                                        </p:tgtEl>
-                                        <p:attrNameLst>
-                                          <p:attrName>ppt_x</p:attrName>
-                                        </p:attrNameLst>
-                                      </p:cBhvr>
-                                      <p:tavLst>
-                                        <p:tav tm="0">
-                                          <p:val>
-                                            <p:strVal val="#ppt_x"/>
-                                          </p:val>
-                                        </p:tav>
-                                        <p:tav tm="100000">
-                                          <p:val>
-                                            <p:strVal val="#ppt_x"/>
-                                          </p:val>
-                                        </p:tav>
-                                      </p:tavLst>
-                                    </p:anim>
-                                    <p:anim calcmode="lin" valueType="num">
-                                      <p:cBhvr>
-                                        <p:cTn id="16" dur="1000" fill="hold"/>
-                                        <p:tgtEl>
-                                          <p:spTgt spid="3">
-                                            <p:txEl>
-                                              <p:pRg st="1" end="1"/>
-                                            </p:txEl>
-                                          </p:spTgt>
-                                        </p:tgtEl>
-                                        <p:attrNameLst>
-                                          <p:attrName>ppt_y</p:attrName>
-                                        </p:attrNameLst>
-                                      </p:cBhvr>
-                                      <p:tavLst>
-                                        <p:tav tm="0">
-                                          <p:val>
-                                            <p:strVal val="#ppt_y+.1"/>
-                                          </p:val>
-                                        </p:tav>
-                                        <p:tav tm="100000">
-                                          <p:val>
-                                            <p:strVal val="#ppt_y"/>
-                                          </p:val>
-                                        </p:tav>
-                                      </p:tavLst>
-                                    </p:anim>
-                                  </p:childTnLst>
-                                </p:cTn>
-                              </p:par>
-                            </p:childTnLst>
-                          </p:cTn>
-                        </p:par>
-                      </p:childTnLst>
-                    </p:cTn>
-                  </p:par>
-                  <p:par>
-                    <p:cTn id="17" fill="hold">
-                      <p:stCondLst>
-                        <p:cond delay="indefinite"/>
-                      </p:stCondLst>
-                      <p:childTnLst>
-                        <p:par>
-                          <p:cTn id="18" fill="hold">
-                            <p:stCondLst>
-                              <p:cond delay="0"/>
-                            </p:stCondLst>
-                            <p:childTnLst>
-                              <p:par>
-                                <p:cTn id="19" presetID="42" presetClass="entr" presetSubtype="0" fill="hold" nodeType="clickEffect">
-                                  <p:stCondLst>
-                                    <p:cond delay="0"/>
-                                  </p:stCondLst>
-                                  <p:childTnLst>
-                                    <p:set>
-                                      <p:cBhvr>
-                                        <p:cTn id="20" dur="1" fill="hold">
-                                          <p:stCondLst>
-                                            <p:cond delay="0"/>
-                                          </p:stCondLst>
-                                        </p:cTn>
-                                        <p:tgtEl>
-                                          <p:spTgt spid="3">
-                                            <p:txEl>
-                                              <p:pRg st="2" end="2"/>
-                                            </p:txEl>
-                                          </p:spTgt>
-                                        </p:tgtEl>
-                                        <p:attrNameLst>
-                                          <p:attrName>style.visibility</p:attrName>
-                                        </p:attrNameLst>
-                                      </p:cBhvr>
-                                      <p:to>
-                                        <p:strVal val="visible"/>
-                                      </p:to>
-                                    </p:set>
-                                    <p:animEffect transition="in" filter="fade">
-                                      <p:cBhvr>
-                                        <p:cTn id="21" dur="1000"/>
-                                        <p:tgtEl>
-                                          <p:spTgt spid="3">
-                                            <p:txEl>
-                                              <p:pRg st="2" end="2"/>
-                                            </p:txEl>
-                                          </p:spTgt>
-                                        </p:tgtEl>
-                                      </p:cBhvr>
-                                    </p:animEffect>
-                                    <p:anim calcmode="lin" valueType="num">
-                                      <p:cBhvr>
-                                        <p:cTn id="22" dur="1000" fill="hold"/>
-                                        <p:tgtEl>
-                                          <p:spTgt spid="3">
-                                            <p:txEl>
-                                              <p:pRg st="2" end="2"/>
-                                            </p:txEl>
-                                          </p:spTgt>
-                                        </p:tgtEl>
-                                        <p:attrNameLst>
-                                          <p:attrName>ppt_x</p:attrName>
-                                        </p:attrNameLst>
-                                      </p:cBhvr>
-                                      <p:tavLst>
-                                        <p:tav tm="0">
-                                          <p:val>
-                                            <p:strVal val="#ppt_x"/>
-                                          </p:val>
-                                        </p:tav>
-                                        <p:tav tm="100000">
-                                          <p:val>
-                                            <p:strVal val="#ppt_x"/>
-                                          </p:val>
-                                        </p:tav>
-                                      </p:tavLst>
-                                    </p:anim>
-                                    <p:anim calcmode="lin" valueType="num">
-                                      <p:cBhvr>
-                                        <p:cTn id="23" dur="1000" fill="hold"/>
-                                        <p:tgtEl>
-                                          <p:spTgt spid="3">
-                                            <p:txEl>
-                                              <p:pRg st="2" end="2"/>
-                                            </p:txEl>
-                                          </p:spTgt>
-                                        </p:tgtEl>
-                                        <p:attrNameLst>
-                                          <p:attrName>ppt_y</p:attrName>
-                                        </p:attrNameLst>
-                                      </p:cBhvr>
-                                      <p:tavLst>
-                                        <p:tav tm="0">
-                                          <p:val>
-                                            <p:strVal val="#ppt_y+.1"/>
-                                          </p:val>
-                                        </p:tav>
-                                        <p:tav tm="100000">
-                                          <p:val>
-                                            <p:strVal val="#ppt_y"/>
-                                          </p:val>
-                                        </p:tav>
-                                      </p:tavLst>
-                                    </p:anim>
-                                  </p:childTnLst>
-                                </p:cTn>
-                              </p:par>
-                            </p:childTnLst>
-                          </p:cTn>
-                        </p:par>
-                      </p:childTnLst>
-                    </p:cTn>
-                  </p:par>
-                  <p:par>
-                    <p:cTn id="24" fill="hold">
-                      <p:stCondLst>
-                        <p:cond delay="indefinite"/>
-                      </p:stCondLst>
-                      <p:childTnLst>
-                        <p:par>
-                          <p:cTn id="25" fill="hold">
-                            <p:stCondLst>
-                              <p:cond delay="0"/>
-                            </p:stCondLst>
-                            <p:childTnLst>
-                              <p:par>
-                                <p:cTn id="26" presetID="42" presetClass="entr" presetSubtype="0" fill="hold" nodeType="clickEffect">
-                                  <p:stCondLst>
-                                    <p:cond delay="0"/>
-                                  </p:stCondLst>
-                                  <p:childTnLst>
-                                    <p:set>
-                                      <p:cBhvr>
-                                        <p:cTn id="27" dur="1" fill="hold">
-                                          <p:stCondLst>
-                                            <p:cond delay="0"/>
-                                          </p:stCondLst>
-                                        </p:cTn>
-                                        <p:tgtEl>
-                                          <p:spTgt spid="3">
-                                            <p:txEl>
-                                              <p:pRg st="3" end="3"/>
-                                            </p:txEl>
-                                          </p:spTgt>
-                                        </p:tgtEl>
-                                        <p:attrNameLst>
-                                          <p:attrName>style.visibility</p:attrName>
-                                        </p:attrNameLst>
-                                      </p:cBhvr>
-                                      <p:to>
-                                        <p:strVal val="visible"/>
-                                      </p:to>
-                                    </p:set>
-                                    <p:animEffect transition="in" filter="fade">
-                                      <p:cBhvr>
-                                        <p:cTn id="28" dur="1000"/>
-                                        <p:tgtEl>
-                                          <p:spTgt spid="3">
-                                            <p:txEl>
-                                              <p:pRg st="3" end="3"/>
-                                            </p:txEl>
-                                          </p:spTgt>
-                                        </p:tgtEl>
-                                      </p:cBhvr>
-                                    </p:animEffect>
-                                    <p:anim calcmode="lin" valueType="num">
-                                      <p:cBhvr>
-                                        <p:cTn id="29" dur="1000" fill="hold"/>
-                                        <p:tgtEl>
-                                          <p:spTgt spid="3">
-                                            <p:txEl>
-                                              <p:pRg st="3" end="3"/>
-                                            </p:txEl>
-                                          </p:spTgt>
-                                        </p:tgtEl>
-                                        <p:attrNameLst>
-                                          <p:attrName>ppt_x</p:attrName>
-                                        </p:attrNameLst>
-                                      </p:cBhvr>
-                                      <p:tavLst>
-                                        <p:tav tm="0">
-                                          <p:val>
-                                            <p:strVal val="#ppt_x"/>
-                                          </p:val>
-                                        </p:tav>
-                                        <p:tav tm="100000">
-                                          <p:val>
-                                            <p:strVal val="#ppt_x"/>
-                                          </p:val>
-                                        </p:tav>
-                                      </p:tavLst>
-                                    </p:anim>
-                                    <p:anim calcmode="lin" valueType="num">
-                                      <p:cBhvr>
-                                        <p:cTn id="30" dur="1000" fill="hold"/>
-                                        <p:tgtEl>
-                                          <p:spTgt spid="3">
-                                            <p:txEl>
-                                              <p:pRg st="3" end="3"/>
-                                            </p:txEl>
-                                          </p:spTgt>
-                                        </p:tgtEl>
-                                        <p:attrNameLst>
-                                          <p:attrName>ppt_y</p:attrName>
-                                        </p:attrNameLst>
-                                      </p:cBhvr>
-                                      <p:tavLst>
-                                        <p:tav tm="0">
-                                          <p:val>
-                                            <p:strVal val="#ppt_y+.1"/>
-                                          </p:val>
-                                        </p:tav>
-                                        <p:tav tm="100000">
-                                          <p:val>
-                                            <p:strVal val="#ppt_y"/>
-                                          </p:val>
-                                        </p:tav>
-                                      </p:tavLst>
-                                    </p:anim>
-                                  </p:childTnLst>
-                                </p:cTn>
-                              </p:par>
-                            </p:childTnLst>
-                          </p:cTn>
-                        </p:par>
-                      </p:childTnLst>
-                    </p:cTn>
-                  </p:par>
-                  <p:par>
-                    <p:cTn id="31" fill="hold">
-                      <p:stCondLst>
-                        <p:cond delay="indefinite"/>
-                      </p:stCondLst>
-                      <p:childTnLst>
-                        <p:par>
-                          <p:cTn id="32" fill="hold">
-                            <p:stCondLst>
-                              <p:cond delay="0"/>
-                            </p:stCondLst>
-                            <p:childTnLst>
-                              <p:par>
-                                <p:cTn id="33" presetID="42" presetClass="entr" presetSubtype="0" fill="hold" nodeType="clickEffect">
-                                  <p:stCondLst>
-                                    <p:cond delay="0"/>
-                                  </p:stCondLst>
-                                  <p:childTnLst>
-                                    <p:set>
-                                      <p:cBhvr>
-                                        <p:cTn id="34" dur="1" fill="hold">
-                                          <p:stCondLst>
-                                            <p:cond delay="0"/>
-                                          </p:stCondLst>
-                                        </p:cTn>
-                                        <p:tgtEl>
-                                          <p:spTgt spid="3">
-                                            <p:txEl>
-                                              <p:pRg st="4" end="4"/>
-                                            </p:txEl>
-                                          </p:spTgt>
-                                        </p:tgtEl>
-                                        <p:attrNameLst>
-                                          <p:attrName>style.visibility</p:attrName>
-                                        </p:attrNameLst>
-                                      </p:cBhvr>
-                                      <p:to>
-                                        <p:strVal val="visible"/>
-                                      </p:to>
-                                    </p:set>
-                                    <p:animEffect transition="in" filter="fade">
-                                      <p:cBhvr>
-                                        <p:cTn id="35" dur="1000"/>
-                                        <p:tgtEl>
-                                          <p:spTgt spid="3">
-                                            <p:txEl>
-                                              <p:pRg st="4" end="4"/>
-                                            </p:txEl>
-                                          </p:spTgt>
-                                        </p:tgtEl>
-                                      </p:cBhvr>
-                                    </p:animEffect>
-                                    <p:anim calcmode="lin" valueType="num">
-                                      <p:cBhvr>
-                                        <p:cTn id="36" dur="1000" fill="hold"/>
-                                        <p:tgtEl>
-                                          <p:spTgt spid="3">
-                                            <p:txEl>
-                                              <p:pRg st="4" end="4"/>
-                                            </p:txEl>
-                                          </p:spTgt>
-                                        </p:tgtEl>
-                                        <p:attrNameLst>
-                                          <p:attrName>ppt_x</p:attrName>
-                                        </p:attrNameLst>
-                                      </p:cBhvr>
-                                      <p:tavLst>
-                                        <p:tav tm="0">
-                                          <p:val>
-                                            <p:strVal val="#ppt_x"/>
-                                          </p:val>
-                                        </p:tav>
-                                        <p:tav tm="100000">
-                                          <p:val>
-                                            <p:strVal val="#ppt_x"/>
-                                          </p:val>
-                                        </p:tav>
-                                      </p:tavLst>
-                                    </p:anim>
-                                    <p:anim calcmode="lin" valueType="num">
-                                      <p:cBhvr>
-                                        <p:cTn id="37" dur="1000" fill="hold"/>
-                                        <p:tgtEl>
-                                          <p:spTgt spid="3">
-                                            <p:txEl>
-                                              <p:pRg st="4" end="4"/>
-                                            </p:txEl>
-                                          </p:spTgt>
-                                        </p:tgtEl>
-                                        <p:attrNameLst>
-                                          <p:attrName>ppt_y</p:attrName>
-                                        </p:attrNameLst>
-                                      </p:cBhvr>
-                                      <p:tavLst>
-                                        <p:tav tm="0">
-                                          <p:val>
-                                            <p:strVal val="#ppt_y+.1"/>
-                                          </p:val>
-                                        </p:tav>
-                                        <p:tav tm="100000">
-                                          <p:val>
-                                            <p:strVal val="#ppt_y"/>
-                                          </p:val>
-                                        </p:tav>
-                                      </p:tavLst>
-                                    </p:anim>
-                                  </p:childTnLst>
-                                </p:cTn>
-                              </p:par>
-                            </p:childTnLst>
-                          </p:cTn>
-                        </p:par>
-                      </p:childTnLst>
-                    </p:cTn>
-                  </p:par>
-                  <p:par>
-                    <p:cTn id="38" fill="hold">
-                      <p:stCondLst>
-                        <p:cond delay="indefinite"/>
-                      </p:stCondLst>
-                      <p:childTnLst>
-                        <p:par>
-                          <p:cTn id="39" fill="hold">
-                            <p:stCondLst>
-                              <p:cond delay="0"/>
-                            </p:stCondLst>
-                            <p:childTnLst>
-                              <p:par>
-                                <p:cTn id="40" presetID="42" presetClass="entr" presetSubtype="0" fill="hold" nodeType="clickEffect">
-                                  <p:stCondLst>
-                                    <p:cond delay="0"/>
-                                  </p:stCondLst>
-                                  <p:childTnLst>
-                                    <p:set>
-                                      <p:cBhvr>
-                                        <p:cTn id="41" dur="1" fill="hold">
-                                          <p:stCondLst>
-                                            <p:cond delay="0"/>
-                                          </p:stCondLst>
-                                        </p:cTn>
-                                        <p:tgtEl>
-                                          <p:spTgt spid="3">
-                                            <p:txEl>
-                                              <p:pRg st="5" end="5"/>
-                                            </p:txEl>
-                                          </p:spTgt>
-                                        </p:tgtEl>
-                                        <p:attrNameLst>
-                                          <p:attrName>style.visibility</p:attrName>
-                                        </p:attrNameLst>
-                                      </p:cBhvr>
-                                      <p:to>
-                                        <p:strVal val="visible"/>
-                                      </p:to>
-                                    </p:set>
-                                    <p:animEffect transition="in" filter="fade">
-                                      <p:cBhvr>
-                                        <p:cTn id="42" dur="1000"/>
-                                        <p:tgtEl>
-                                          <p:spTgt spid="3">
-                                            <p:txEl>
-                                              <p:pRg st="5" end="5"/>
-                                            </p:txEl>
-                                          </p:spTgt>
-                                        </p:tgtEl>
-                                      </p:cBhvr>
-                                    </p:animEffect>
-                                    <p:anim calcmode="lin" valueType="num">
-                                      <p:cBhvr>
-                                        <p:cTn id="43" dur="1000" fill="hold"/>
-                                        <p:tgtEl>
-                                          <p:spTgt spid="3">
-                                            <p:txEl>
-                                              <p:pRg st="5" end="5"/>
-                                            </p:txEl>
-                                          </p:spTgt>
-                                        </p:tgtEl>
-                                        <p:attrNameLst>
-                                          <p:attrName>ppt_x</p:attrName>
-                                        </p:attrNameLst>
-                                      </p:cBhvr>
-                                      <p:tavLst>
-                                        <p:tav tm="0">
-                                          <p:val>
-                                            <p:strVal val="#ppt_x"/>
-                                          </p:val>
-                                        </p:tav>
-                                        <p:tav tm="100000">
-                                          <p:val>
-                                            <p:strVal val="#ppt_x"/>
-                                          </p:val>
-                                        </p:tav>
-                                      </p:tavLst>
-                                    </p:anim>
-                                    <p:anim calcmode="lin" valueType="num">
-                                      <p:cBhvr>
-                                        <p:cTn id="44" dur="1000" fill="hold"/>
-                                        <p:tgtEl>
-                                          <p:spTgt spid="3">
-                                            <p:txEl>
-                                              <p:pRg st="5" end="5"/>
-                                            </p:txEl>
-                                          </p:spTgt>
-                                        </p:tgtEl>
-                                        <p:attrNameLst>
-                                          <p:attrName>ppt_y</p:attrName>
-                                        </p:attrNameLst>
-                                      </p:cBhvr>
-                                      <p:tavLst>
-                                        <p:tav tm="0">
-                                          <p:val>
-                                            <p:strVal val="#ppt_y+.1"/>
-                                          </p:val>
-                                        </p:tav>
-                                        <p:tav tm="100000">
-                                          <p:val>
-                                            <p:strVal val="#ppt_y"/>
-                                          </p:val>
-                                        </p:tav>
-                                      </p:tavLst>
-                                    </p:anim>
-                                  </p:childTnLst>
-                                </p:cTn>
-                              </p:par>
-                            </p:childTnLst>
-                          </p:cTn>
-                        </p:par>
-                      </p:childTnLst>
-                    </p:cTn>
-                  </p:par>
-                </p:childTnLst>
-              </p:cTn>
-              <p:prevCondLst>
-                <p:cond evt="onPrev" delay="0">
-                  <p:tgtEl>
-                    <p:sldTgt/>
-                  </p:tgtEl>
-                </p:cond>
-              </p:prevCondLst>
-              <p:nextCondLst>
-                <p:cond evt="onNext" delay="0">
-                  <p:tgtEl>
-                    <p:sldTgt/>
-                  </p:tgtEl>
-                </p:cond>
-              </p:nextCondLst>
-            </p:seq>
-          </p:childTnLst>
-        </p:cTn>
-      </p:par>
-    </p:tnLst>
-  </p:timing>
 </p:sld>
 </file>
 
@@ -5691,71 +5065,6 @@
     <p:extLst>
       <p:ext uri="{BB962C8B-B14F-4D97-AF65-F5344CB8AC3E}">
         <p14:creationId xmlns:p14="http://schemas.microsoft.com/office/powerpoint/2010/main" val="3444963043"/>
-      </p:ext>
-    </p:extLst>
-  </p:cSld>
-  <p:clrMapOvr>
-    <a:masterClrMapping/>
-  </p:clrMapOvr>
-</p:sld>
-</file>
-
-<file path=ppt/slides/slide5.xml><?xml version="1.0" encoding="utf-8"?>
-<p:sld xmlns:a="http://schemas.openxmlformats.org/drawingml/2006/main" xmlns:r="http://schemas.openxmlformats.org/officeDocument/2006/relationships" xmlns:p="http://schemas.openxmlformats.org/presentationml/2006/main">
-  <p:cSld>
-    <p:spTree>
-      <p:nvGrpSpPr>
-        <p:cNvPr id="1" name=""/>
-        <p:cNvGrpSpPr/>
-        <p:nvPr/>
-      </p:nvGrpSpPr>
-      <p:grpSpPr>
-        <a:xfrm>
-          <a:off x="0" y="0"/>
-          <a:ext cx="0" cy="0"/>
-          <a:chOff x="0" y="0"/>
-          <a:chExt cx="0" cy="0"/>
-        </a:xfrm>
-      </p:grpSpPr>
-      <p:sp>
-        <p:nvSpPr>
-          <p:cNvPr id="2" name="Cím 1">
-            <a:extLst>
-              <a:ext uri="{FF2B5EF4-FFF2-40B4-BE49-F238E27FC236}">
-                <a16:creationId xmlns:a16="http://schemas.microsoft.com/office/drawing/2014/main" id="{BDA9BD9B-777F-65E0-F5CA-592AD2FE470D}"/>
-              </a:ext>
-            </a:extLst>
-          </p:cNvPr>
-          <p:cNvSpPr>
-            <a:spLocks noGrp="1"/>
-          </p:cNvSpPr>
-          <p:nvPr>
-            <p:ph type="title"/>
-          </p:nvPr>
-        </p:nvSpPr>
-        <p:spPr>
-          <a:xfrm>
-            <a:off x="1330809" y="1235839"/>
-            <a:ext cx="10694414" cy="2508025"/>
-          </a:xfrm>
-        </p:spPr>
-        <p:txBody>
-          <a:bodyPr>
-            <a:normAutofit/>
-          </a:bodyPr>
-          <a:lstStyle/>
-          <a:p>
-            <a:r>
-              <a:rPr lang="hu-HU" sz="4400" dirty="0"/>
-              <a:t>Köszönjük a figyelmet!</a:t>
-            </a:r>
-          </a:p>
-        </p:txBody>
-      </p:sp>
-    </p:spTree>
-    <p:extLst>
-      <p:ext uri="{BB962C8B-B14F-4D97-AF65-F5344CB8AC3E}">
-        <p14:creationId xmlns:p14="http://schemas.microsoft.com/office/powerpoint/2010/main" val="3924192126"/>
       </p:ext>
     </p:extLst>
   </p:cSld>
